--- a/Strategic_Blueprint_Presentation.pptx
+++ b/Strategic_Blueprint_Presentation.pptx
@@ -325,7 +325,7 @@
           <a:p>
             <a:fld id="{5BCAD085-E8A6-8845-BD4E-CB4CCA059FC4}" type="datetimeFigureOut">
               <a:rPr lang="en-US" smtClean="0"/>
-              <a:t>6/13/2025</a:t>
+              <a:t>6/14/2025</a:t>
             </a:fld>
             <a:endParaRPr lang="en-US"/>
           </a:p>
@@ -623,7 +623,7 @@
           <a:p>
             <a:fld id="{5BCAD085-E8A6-8845-BD4E-CB4CCA059FC4}" type="datetimeFigureOut">
               <a:rPr lang="en-US" smtClean="0"/>
-              <a:t>6/13/2025</a:t>
+              <a:t>6/14/2025</a:t>
             </a:fld>
             <a:endParaRPr lang="en-US"/>
           </a:p>
@@ -815,7 +815,7 @@
           <a:p>
             <a:fld id="{5BCAD085-E8A6-8845-BD4E-CB4CCA059FC4}" type="datetimeFigureOut">
               <a:rPr lang="en-US" smtClean="0"/>
-              <a:t>6/13/2025</a:t>
+              <a:t>6/14/2025</a:t>
             </a:fld>
             <a:endParaRPr lang="en-US"/>
           </a:p>
@@ -1076,7 +1076,7 @@
           <a:p>
             <a:fld id="{5BCAD085-E8A6-8845-BD4E-CB4CCA059FC4}" type="datetimeFigureOut">
               <a:rPr lang="en-US" smtClean="0"/>
-              <a:t>6/13/2025</a:t>
+              <a:t>6/14/2025</a:t>
             </a:fld>
             <a:endParaRPr lang="en-US"/>
           </a:p>
@@ -1500,7 +1500,7 @@
           <a:p>
             <a:fld id="{5BCAD085-E8A6-8845-BD4E-CB4CCA059FC4}" type="datetimeFigureOut">
               <a:rPr lang="en-US" smtClean="0"/>
-              <a:t>6/13/2025</a:t>
+              <a:t>6/14/2025</a:t>
             </a:fld>
             <a:endParaRPr lang="en-US"/>
           </a:p>
@@ -2037,7 +2037,7 @@
           <a:p>
             <a:fld id="{5BCAD085-E8A6-8845-BD4E-CB4CCA059FC4}" type="datetimeFigureOut">
               <a:rPr lang="en-US" smtClean="0"/>
-              <a:t>6/13/2025</a:t>
+              <a:t>6/14/2025</a:t>
             </a:fld>
             <a:endParaRPr lang="en-US"/>
           </a:p>
@@ -2901,7 +2901,7 @@
           <a:p>
             <a:fld id="{5BCAD085-E8A6-8845-BD4E-CB4CCA059FC4}" type="datetimeFigureOut">
               <a:rPr lang="en-US" smtClean="0"/>
-              <a:t>6/13/2025</a:t>
+              <a:t>6/14/2025</a:t>
             </a:fld>
             <a:endParaRPr lang="en-US"/>
           </a:p>
@@ -3071,7 +3071,7 @@
           <a:p>
             <a:fld id="{5BCAD085-E8A6-8845-BD4E-CB4CCA059FC4}" type="datetimeFigureOut">
               <a:rPr lang="en-US" smtClean="0"/>
-              <a:t>6/13/2025</a:t>
+              <a:t>6/14/2025</a:t>
             </a:fld>
             <a:endParaRPr lang="en-US"/>
           </a:p>
@@ -3255,7 +3255,7 @@
           <a:p>
             <a:fld id="{5BCAD085-E8A6-8845-BD4E-CB4CCA059FC4}" type="datetimeFigureOut">
               <a:rPr lang="en-US" smtClean="0"/>
-              <a:t>6/13/2025</a:t>
+              <a:t>6/14/2025</a:t>
             </a:fld>
             <a:endParaRPr lang="en-US"/>
           </a:p>
@@ -3425,7 +3425,7 @@
           <a:p>
             <a:fld id="{5BCAD085-E8A6-8845-BD4E-CB4CCA059FC4}" type="datetimeFigureOut">
               <a:rPr lang="en-US" smtClean="0"/>
-              <a:t>6/13/2025</a:t>
+              <a:t>6/14/2025</a:t>
             </a:fld>
             <a:endParaRPr lang="en-US"/>
           </a:p>
@@ -3669,7 +3669,7 @@
           <a:p>
             <a:fld id="{5BCAD085-E8A6-8845-BD4E-CB4CCA059FC4}" type="datetimeFigureOut">
               <a:rPr lang="en-US" smtClean="0"/>
-              <a:t>6/13/2025</a:t>
+              <a:t>6/14/2025</a:t>
             </a:fld>
             <a:endParaRPr lang="en-US"/>
           </a:p>
@@ -3905,7 +3905,7 @@
           <a:p>
             <a:fld id="{5BCAD085-E8A6-8845-BD4E-CB4CCA059FC4}" type="datetimeFigureOut">
               <a:rPr lang="en-US" smtClean="0"/>
-              <a:t>6/13/2025</a:t>
+              <a:t>6/14/2025</a:t>
             </a:fld>
             <a:endParaRPr lang="en-US"/>
           </a:p>
@@ -4371,7 +4371,7 @@
           <a:p>
             <a:fld id="{5BCAD085-E8A6-8845-BD4E-CB4CCA059FC4}" type="datetimeFigureOut">
               <a:rPr lang="en-US" smtClean="0"/>
-              <a:t>6/13/2025</a:t>
+              <a:t>6/14/2025</a:t>
             </a:fld>
             <a:endParaRPr lang="en-US"/>
           </a:p>
@@ -4489,7 +4489,7 @@
           <a:p>
             <a:fld id="{5BCAD085-E8A6-8845-BD4E-CB4CCA059FC4}" type="datetimeFigureOut">
               <a:rPr lang="en-US" smtClean="0"/>
-              <a:t>6/13/2025</a:t>
+              <a:t>6/14/2025</a:t>
             </a:fld>
             <a:endParaRPr lang="en-US"/>
           </a:p>
@@ -4584,7 +4584,7 @@
           <a:p>
             <a:fld id="{5BCAD085-E8A6-8845-BD4E-CB4CCA059FC4}" type="datetimeFigureOut">
               <a:rPr lang="en-US" smtClean="0"/>
-              <a:t>6/13/2025</a:t>
+              <a:t>6/14/2025</a:t>
             </a:fld>
             <a:endParaRPr lang="en-US"/>
           </a:p>
@@ -4839,7 +4839,7 @@
           <a:p>
             <a:fld id="{5BCAD085-E8A6-8845-BD4E-CB4CCA059FC4}" type="datetimeFigureOut">
               <a:rPr lang="en-US" smtClean="0"/>
-              <a:t>6/13/2025</a:t>
+              <a:t>6/14/2025</a:t>
             </a:fld>
             <a:endParaRPr lang="en-US"/>
           </a:p>
@@ -5139,7 +5139,7 @@
           <a:p>
             <a:fld id="{5BCAD085-E8A6-8845-BD4E-CB4CCA059FC4}" type="datetimeFigureOut">
               <a:rPr lang="en-US" smtClean="0"/>
-              <a:t>6/13/2025</a:t>
+              <a:t>6/14/2025</a:t>
             </a:fld>
             <a:endParaRPr lang="en-US"/>
           </a:p>
@@ -5373,7 +5373,7 @@
           <a:p>
             <a:fld id="{5BCAD085-E8A6-8845-BD4E-CB4CCA059FC4}" type="datetimeFigureOut">
               <a:rPr lang="en-US" smtClean="0"/>
-              <a:t>6/13/2025</a:t>
+              <a:t>6/14/2025</a:t>
             </a:fld>
             <a:endParaRPr lang="en-US"/>
           </a:p>
@@ -6657,16 +6657,19 @@
           <a:lstStyle/>
           <a:p>
             <a:r>
+              <a:rPr dirty="0"/>
               <a:t>• Align teams for October</a:t>
             </a:r>
           </a:p>
           <a:p>
             <a:r>
+              <a:rPr dirty="0"/>
               <a:t>• Launch summer promos</a:t>
             </a:r>
           </a:p>
           <a:p>
             <a:r>
+              <a:rPr dirty="0"/>
               <a:t>→ Goal: Boost peaks, smooth troughs</a:t>
             </a:r>
           </a:p>
@@ -7458,21 +7461,33 @@
           <a:lstStyle/>
           <a:p>
             <a:r>
-              <a:t>• Customer 17511 brings major revenue</a:t>
-            </a:r>
-          </a:p>
-          <a:p>
-            <a:r>
+              <a:rPr dirty="0"/>
+              <a:t>• Customer</a:t>
+            </a:r>
+            <a:r>
+              <a:rPr lang="ar-EG" dirty="0"/>
+              <a:t> 18102 &amp; 14646 brings</a:t>
+            </a:r>
+            <a:r>
+              <a:rPr dirty="0"/>
+              <a:t> major revenue</a:t>
+            </a:r>
+          </a:p>
+          <a:p>
+            <a:r>
+              <a:rPr dirty="0"/>
               <a:t>• Heavy reliance on a few</a:t>
             </a:r>
           </a:p>
           <a:p>
             <a:r>
+              <a:rPr dirty="0"/>
               <a:t>→ What if one leaves?</a:t>
             </a:r>
           </a:p>
           <a:p>
             <a:r>
+              <a:rPr dirty="0"/>
               <a:t>→ Are we seeking similar customers?</a:t>
             </a:r>
           </a:p>
@@ -7622,6 +7637,7 @@
           <a:lstStyle/>
           <a:p>
             <a:r>
+              <a:rPr dirty="0"/>
               <a:t>Solution #2 – Protect &amp; Multiply</a:t>
             </a:r>
           </a:p>
@@ -7643,21 +7659,25 @@
           <a:lstStyle/>
           <a:p>
             <a:r>
+              <a:rPr dirty="0"/>
               <a:t>• VIP treatment for top customers</a:t>
             </a:r>
           </a:p>
           <a:p>
             <a:r>
+              <a:rPr dirty="0"/>
               <a:t>• Contingency plans</a:t>
             </a:r>
           </a:p>
           <a:p>
             <a:r>
+              <a:rPr dirty="0"/>
               <a:t>• Create look-alike profiles</a:t>
             </a:r>
           </a:p>
           <a:p>
             <a:r>
+              <a:rPr dirty="0"/>
               <a:t>→ Goal: Secure and expand top-tier base</a:t>
             </a:r>
           </a:p>
